--- a/ゲーム科2年/00_前期/ゲームエンジンⅢ/バージョン管理/02_リポジトリ作成.pptx
+++ b/ゲーム科2年/00_前期/ゲームエンジンⅢ/バージョン管理/02_リポジトリ作成.pptx
@@ -268,7 +268,7 @@
           <a:p>
             <a:fld id="{E9CC885B-4903-4D54-9A93-00025F12DED9}" type="datetimeFigureOut">
               <a:rPr kumimoji="1" lang="ja-JP" altLang="en-US" smtClean="0"/>
-              <a:t>2025/1/15</a:t>
+              <a:t>2025/1/17</a:t>
             </a:fld>
             <a:endParaRPr kumimoji="1" lang="ja-JP" altLang="en-US"/>
           </a:p>
@@ -498,7 +498,7 @@
           <a:p>
             <a:fld id="{E9CC885B-4903-4D54-9A93-00025F12DED9}" type="datetimeFigureOut">
               <a:rPr kumimoji="1" lang="ja-JP" altLang="en-US" smtClean="0"/>
-              <a:t>2025/1/15</a:t>
+              <a:t>2025/1/17</a:t>
             </a:fld>
             <a:endParaRPr kumimoji="1" lang="ja-JP" altLang="en-US"/>
           </a:p>
@@ -738,7 +738,7 @@
           <a:p>
             <a:fld id="{E9CC885B-4903-4D54-9A93-00025F12DED9}" type="datetimeFigureOut">
               <a:rPr kumimoji="1" lang="ja-JP" altLang="en-US" smtClean="0"/>
-              <a:t>2025/1/15</a:t>
+              <a:t>2025/1/17</a:t>
             </a:fld>
             <a:endParaRPr kumimoji="1" lang="ja-JP" altLang="en-US"/>
           </a:p>
@@ -968,7 +968,7 @@
           <a:p>
             <a:fld id="{E9CC885B-4903-4D54-9A93-00025F12DED9}" type="datetimeFigureOut">
               <a:rPr kumimoji="1" lang="ja-JP" altLang="en-US" smtClean="0"/>
-              <a:t>2025/1/15</a:t>
+              <a:t>2025/1/17</a:t>
             </a:fld>
             <a:endParaRPr kumimoji="1" lang="ja-JP" altLang="en-US"/>
           </a:p>
@@ -1243,7 +1243,7 @@
           <a:p>
             <a:fld id="{E9CC885B-4903-4D54-9A93-00025F12DED9}" type="datetimeFigureOut">
               <a:rPr kumimoji="1" lang="ja-JP" altLang="en-US" smtClean="0"/>
-              <a:t>2025/1/15</a:t>
+              <a:t>2025/1/17</a:t>
             </a:fld>
             <a:endParaRPr kumimoji="1" lang="ja-JP" altLang="en-US"/>
           </a:p>
@@ -1572,7 +1572,7 @@
           <a:p>
             <a:fld id="{E9CC885B-4903-4D54-9A93-00025F12DED9}" type="datetimeFigureOut">
               <a:rPr kumimoji="1" lang="ja-JP" altLang="en-US" smtClean="0"/>
-              <a:t>2025/1/15</a:t>
+              <a:t>2025/1/17</a:t>
             </a:fld>
             <a:endParaRPr kumimoji="1" lang="ja-JP" altLang="en-US"/>
           </a:p>
@@ -2048,7 +2048,7 @@
           <a:p>
             <a:fld id="{E9CC885B-4903-4D54-9A93-00025F12DED9}" type="datetimeFigureOut">
               <a:rPr kumimoji="1" lang="ja-JP" altLang="en-US" smtClean="0"/>
-              <a:t>2025/1/15</a:t>
+              <a:t>2025/1/17</a:t>
             </a:fld>
             <a:endParaRPr kumimoji="1" lang="ja-JP" altLang="en-US"/>
           </a:p>
@@ -2189,7 +2189,7 @@
           <a:p>
             <a:fld id="{E9CC885B-4903-4D54-9A93-00025F12DED9}" type="datetimeFigureOut">
               <a:rPr kumimoji="1" lang="ja-JP" altLang="en-US" smtClean="0"/>
-              <a:t>2025/1/15</a:t>
+              <a:t>2025/1/17</a:t>
             </a:fld>
             <a:endParaRPr kumimoji="1" lang="ja-JP" altLang="en-US"/>
           </a:p>
@@ -2302,7 +2302,7 @@
           <a:p>
             <a:fld id="{E9CC885B-4903-4D54-9A93-00025F12DED9}" type="datetimeFigureOut">
               <a:rPr kumimoji="1" lang="ja-JP" altLang="en-US" smtClean="0"/>
-              <a:t>2025/1/15</a:t>
+              <a:t>2025/1/17</a:t>
             </a:fld>
             <a:endParaRPr kumimoji="1" lang="ja-JP" altLang="en-US"/>
           </a:p>
@@ -2645,7 +2645,7 @@
           <a:p>
             <a:fld id="{E9CC885B-4903-4D54-9A93-00025F12DED9}" type="datetimeFigureOut">
               <a:rPr kumimoji="1" lang="ja-JP" altLang="en-US" smtClean="0"/>
-              <a:t>2025/1/15</a:t>
+              <a:t>2025/1/17</a:t>
             </a:fld>
             <a:endParaRPr kumimoji="1" lang="ja-JP" altLang="en-US"/>
           </a:p>
@@ -2933,7 +2933,7 @@
           <a:p>
             <a:fld id="{E9CC885B-4903-4D54-9A93-00025F12DED9}" type="datetimeFigureOut">
               <a:rPr kumimoji="1" lang="ja-JP" altLang="en-US" smtClean="0"/>
-              <a:t>2025/1/15</a:t>
+              <a:t>2025/1/17</a:t>
             </a:fld>
             <a:endParaRPr kumimoji="1" lang="ja-JP" altLang="en-US"/>
           </a:p>
@@ -3206,7 +3206,7 @@
           <a:p>
             <a:fld id="{E9CC885B-4903-4D54-9A93-00025F12DED9}" type="datetimeFigureOut">
               <a:rPr kumimoji="1" lang="ja-JP" altLang="en-US" smtClean="0"/>
-              <a:t>2025/1/15</a:t>
+              <a:t>2025/1/17</a:t>
             </a:fld>
             <a:endParaRPr kumimoji="1" lang="ja-JP" altLang="en-US"/>
           </a:p>
@@ -3673,7 +3673,7 @@
         <p:spPr>
           <a:xfrm>
             <a:off x="567542" y="1216429"/>
-            <a:ext cx="9417963" cy="3416320"/>
+            <a:ext cx="9417963" cy="3785652"/>
           </a:xfrm>
           <a:prstGeom prst="rect">
             <a:avLst/>
@@ -3720,7 +3720,7 @@
           <a:p>
             <a:r>
               <a:rPr lang="ja-JP" altLang="en-US" sz="2400" dirty="0"/>
-              <a:t>・２～３人であること</a:t>
+              <a:t>・３人以上であること</a:t>
             </a:r>
             <a:endParaRPr lang="en-US" altLang="ja-JP" sz="2400" dirty="0"/>
           </a:p>
@@ -3740,6 +3740,45 @@
           </a:p>
           <a:p>
             <a:endParaRPr lang="en-US" altLang="ja-JP" sz="2400" dirty="0"/>
+          </a:p>
+          <a:p>
+            <a:r>
+              <a:rPr lang="en-US" altLang="ja-JP" sz="2400" b="1" dirty="0">
+                <a:solidFill>
+                  <a:srgbClr val="FF0000"/>
+                </a:solidFill>
+              </a:rPr>
+              <a:t>※</a:t>
+            </a:r>
+            <a:r>
+              <a:rPr lang="ja-JP" altLang="en-US" sz="2400" b="1" dirty="0">
+                <a:solidFill>
+                  <a:srgbClr val="FF0000"/>
+                </a:solidFill>
+              </a:rPr>
+              <a:t>今回は</a:t>
+            </a:r>
+            <a:r>
+              <a:rPr lang="en-US" altLang="ja-JP" sz="2400" b="1" dirty="0" err="1">
+                <a:solidFill>
+                  <a:srgbClr val="FF0000"/>
+                </a:solidFill>
+              </a:rPr>
+              <a:t>BitBucket</a:t>
+            </a:r>
+            <a:r>
+              <a:rPr lang="ja-JP" altLang="en-US" sz="2400" b="1" dirty="0">
+                <a:solidFill>
+                  <a:srgbClr val="FF0000"/>
+                </a:solidFill>
+              </a:rPr>
+              <a:t>を使った方法を学習します</a:t>
+            </a:r>
+            <a:endParaRPr lang="en-US" altLang="ja-JP" sz="2400" b="1" dirty="0">
+              <a:solidFill>
+                <a:srgbClr val="FF0000"/>
+              </a:solidFill>
+            </a:endParaRPr>
           </a:p>
           <a:p>
             <a:r>
@@ -3867,8 +3906,12 @@
           </a:p>
           <a:p>
             <a:r>
+              <a:rPr lang="ja-JP" altLang="en-US" sz="2400"/>
+              <a:t>実際はここ</a:t>
+            </a:r>
+            <a:r>
               <a:rPr lang="ja-JP" altLang="en-US" sz="2400" dirty="0"/>
-              <a:t>ここにゲームプロジェクトを追加して作業を進めていきます。</a:t>
+              <a:t>にゲームプロジェクトを追加して作業を進めていきます。</a:t>
             </a:r>
             <a:endParaRPr lang="en-US" altLang="ja-JP" sz="2400" dirty="0"/>
           </a:p>

--- a/ゲーム科2年/00_前期/ゲームエンジンⅢ/バージョン管理/02_リポジトリ作成.pptx
+++ b/ゲーム科2年/00_前期/ゲームエンジンⅢ/バージョン管理/02_リポジトリ作成.pptx
@@ -268,7 +268,7 @@
           <a:p>
             <a:fld id="{E9CC885B-4903-4D54-9A93-00025F12DED9}" type="datetimeFigureOut">
               <a:rPr kumimoji="1" lang="ja-JP" altLang="en-US" smtClean="0"/>
-              <a:t>2025/1/17</a:t>
+              <a:t>2025/2/27</a:t>
             </a:fld>
             <a:endParaRPr kumimoji="1" lang="ja-JP" altLang="en-US"/>
           </a:p>
@@ -498,7 +498,7 @@
           <a:p>
             <a:fld id="{E9CC885B-4903-4D54-9A93-00025F12DED9}" type="datetimeFigureOut">
               <a:rPr kumimoji="1" lang="ja-JP" altLang="en-US" smtClean="0"/>
-              <a:t>2025/1/17</a:t>
+              <a:t>2025/2/27</a:t>
             </a:fld>
             <a:endParaRPr kumimoji="1" lang="ja-JP" altLang="en-US"/>
           </a:p>
@@ -738,7 +738,7 @@
           <a:p>
             <a:fld id="{E9CC885B-4903-4D54-9A93-00025F12DED9}" type="datetimeFigureOut">
               <a:rPr kumimoji="1" lang="ja-JP" altLang="en-US" smtClean="0"/>
-              <a:t>2025/1/17</a:t>
+              <a:t>2025/2/27</a:t>
             </a:fld>
             <a:endParaRPr kumimoji="1" lang="ja-JP" altLang="en-US"/>
           </a:p>
@@ -968,7 +968,7 @@
           <a:p>
             <a:fld id="{E9CC885B-4903-4D54-9A93-00025F12DED9}" type="datetimeFigureOut">
               <a:rPr kumimoji="1" lang="ja-JP" altLang="en-US" smtClean="0"/>
-              <a:t>2025/1/17</a:t>
+              <a:t>2025/2/27</a:t>
             </a:fld>
             <a:endParaRPr kumimoji="1" lang="ja-JP" altLang="en-US"/>
           </a:p>
@@ -1243,7 +1243,7 @@
           <a:p>
             <a:fld id="{E9CC885B-4903-4D54-9A93-00025F12DED9}" type="datetimeFigureOut">
               <a:rPr kumimoji="1" lang="ja-JP" altLang="en-US" smtClean="0"/>
-              <a:t>2025/1/17</a:t>
+              <a:t>2025/2/27</a:t>
             </a:fld>
             <a:endParaRPr kumimoji="1" lang="ja-JP" altLang="en-US"/>
           </a:p>
@@ -1572,7 +1572,7 @@
           <a:p>
             <a:fld id="{E9CC885B-4903-4D54-9A93-00025F12DED9}" type="datetimeFigureOut">
               <a:rPr kumimoji="1" lang="ja-JP" altLang="en-US" smtClean="0"/>
-              <a:t>2025/1/17</a:t>
+              <a:t>2025/2/27</a:t>
             </a:fld>
             <a:endParaRPr kumimoji="1" lang="ja-JP" altLang="en-US"/>
           </a:p>
@@ -2048,7 +2048,7 @@
           <a:p>
             <a:fld id="{E9CC885B-4903-4D54-9A93-00025F12DED9}" type="datetimeFigureOut">
               <a:rPr kumimoji="1" lang="ja-JP" altLang="en-US" smtClean="0"/>
-              <a:t>2025/1/17</a:t>
+              <a:t>2025/2/27</a:t>
             </a:fld>
             <a:endParaRPr kumimoji="1" lang="ja-JP" altLang="en-US"/>
           </a:p>
@@ -2189,7 +2189,7 @@
           <a:p>
             <a:fld id="{E9CC885B-4903-4D54-9A93-00025F12DED9}" type="datetimeFigureOut">
               <a:rPr kumimoji="1" lang="ja-JP" altLang="en-US" smtClean="0"/>
-              <a:t>2025/1/17</a:t>
+              <a:t>2025/2/27</a:t>
             </a:fld>
             <a:endParaRPr kumimoji="1" lang="ja-JP" altLang="en-US"/>
           </a:p>
@@ -2302,7 +2302,7 @@
           <a:p>
             <a:fld id="{E9CC885B-4903-4D54-9A93-00025F12DED9}" type="datetimeFigureOut">
               <a:rPr kumimoji="1" lang="ja-JP" altLang="en-US" smtClean="0"/>
-              <a:t>2025/1/17</a:t>
+              <a:t>2025/2/27</a:t>
             </a:fld>
             <a:endParaRPr kumimoji="1" lang="ja-JP" altLang="en-US"/>
           </a:p>
@@ -2645,7 +2645,7 @@
           <a:p>
             <a:fld id="{E9CC885B-4903-4D54-9A93-00025F12DED9}" type="datetimeFigureOut">
               <a:rPr kumimoji="1" lang="ja-JP" altLang="en-US" smtClean="0"/>
-              <a:t>2025/1/17</a:t>
+              <a:t>2025/2/27</a:t>
             </a:fld>
             <a:endParaRPr kumimoji="1" lang="ja-JP" altLang="en-US"/>
           </a:p>
@@ -2933,7 +2933,7 @@
           <a:p>
             <a:fld id="{E9CC885B-4903-4D54-9A93-00025F12DED9}" type="datetimeFigureOut">
               <a:rPr kumimoji="1" lang="ja-JP" altLang="en-US" smtClean="0"/>
-              <a:t>2025/1/17</a:t>
+              <a:t>2025/2/27</a:t>
             </a:fld>
             <a:endParaRPr kumimoji="1" lang="ja-JP" altLang="en-US"/>
           </a:p>
@@ -3206,7 +3206,7 @@
           <a:p>
             <a:fld id="{E9CC885B-4903-4D54-9A93-00025F12DED9}" type="datetimeFigureOut">
               <a:rPr kumimoji="1" lang="ja-JP" altLang="en-US" smtClean="0"/>
-              <a:t>2025/1/17</a:t>
+              <a:t>2025/2/27</a:t>
             </a:fld>
             <a:endParaRPr kumimoji="1" lang="ja-JP" altLang="en-US"/>
           </a:p>
@@ -4335,7 +4335,23 @@
                   <a:srgbClr val="FF0000"/>
                 </a:solidFill>
               </a:rPr>
-              <a:t>①チーム名をアルファベットで入力</a:t>
+              <a:t>①チーム名を</a:t>
+            </a:r>
+            <a:r>
+              <a:rPr lang="ja-JP" altLang="en-US" sz="2400" b="1" dirty="0">
+                <a:solidFill>
+                  <a:srgbClr val="FF0000"/>
+                </a:solidFill>
+              </a:rPr>
+              <a:t>アルファベット</a:t>
+            </a:r>
+            <a:r>
+              <a:rPr lang="ja-JP" altLang="en-US" sz="2400" dirty="0">
+                <a:solidFill>
+                  <a:srgbClr val="FF0000"/>
+                </a:solidFill>
+              </a:rPr>
+              <a:t>で入力</a:t>
             </a:r>
             <a:endParaRPr lang="en-US" altLang="ja-JP" sz="2400" dirty="0">
               <a:solidFill>
